--- a/slides/team-decks/Week3-Tue-the-professors-favorites.pptx
+++ b/slides/team-decks/Week3-Tue-the-professors-favorites.pptx
@@ -13,6 +13,8 @@
     <p:sldId id="261" r:id="rId13"/>
     <p:sldId id="262" r:id="rId14"/>
     <p:sldId id="263" r:id="rId15"/>
+    <p:sldId id="264" r:id="rId16"/>
+    <p:sldId id="265" r:id="rId17"/>
   </p:sldIdLst>
   <p:sldSz cx="12191695" cy="6858000" type="screen4x3"/>
   <p:notesSz cx="6858000" cy="9144000"/>
@@ -789,7 +791,7 @@
           <a:lstStyle/>
           <a:p>
             <a:r>
-              <a:t>Section header — the team's own slides go after this one.</a:t>
+              <a:t>Sebastien Gournay's individually graded section. Their reflection lives in their own lane on the team FigJam canvas.</a:t>
             </a:r>
           </a:p>
         </p:txBody>
@@ -815,6 +817,146 @@
 </file>
 
 <file path=ppt/notesSlides/notesSlide6.xml><?xml version="1.0" encoding="utf-8"?>
+<p:notes xmlns:a="http://schemas.openxmlformats.org/drawingml/2006/main" xmlns:p="http://schemas.openxmlformats.org/presentationml/2006/main" xmlns:r="http://schemas.openxmlformats.org/officeDocument/2006/relationships">
+  <p:cSld>
+    <p:spTree>
+      <p:nvGrpSpPr>
+        <p:cNvPr id="1" name=""/>
+        <p:cNvGrpSpPr/>
+        <p:nvPr/>
+      </p:nvGrpSpPr>
+      <p:grpSpPr>
+        <a:xfrm>
+          <a:off x="0" y="0"/>
+          <a:ext cx="0" cy="0"/>
+          <a:chOff x="0" y="0"/>
+          <a:chExt cx="0" cy="0"/>
+        </a:xfrm>
+      </p:grpSpPr>
+      <p:sp>
+        <p:nvSpPr>
+          <p:cNvPr id="2" name="Slide Image Placeholder 1"/>
+          <p:cNvSpPr>
+            <a:spLocks noGrp="1"/>
+          </p:cNvSpPr>
+          <p:nvPr>
+            <p:ph type="sldImg" idx="2"/>
+          </p:nvPr>
+        </p:nvSpPr>
+        <p:spPr/>
+      </p:sp>
+      <p:sp>
+        <p:nvSpPr>
+          <p:cNvPr id="3" name="Notes Placeholder 2"/>
+          <p:cNvSpPr>
+            <a:spLocks noGrp="1"/>
+          </p:cNvSpPr>
+          <p:nvPr>
+            <p:ph type="body" idx="3" sz="quarter"/>
+          </p:nvPr>
+        </p:nvSpPr>
+        <p:spPr/>
+        <p:txBody>
+          <a:bodyPr/>
+          <a:lstStyle/>
+          <a:p>
+            <a:r>
+              <a:t>Justin Ou's individually graded section. Their reflection lives in their own lane on the team FigJam canvas.</a:t>
+            </a:r>
+          </a:p>
+        </p:txBody>
+      </p:sp>
+      <p:sp>
+        <p:nvSpPr>
+          <p:cNvPr id="4" name="Slide Number Placeholder 3"/>
+          <p:cNvSpPr>
+            <a:spLocks noGrp="1"/>
+          </p:cNvSpPr>
+          <p:nvPr>
+            <p:ph type="sldNum" idx="5" sz="quarter"/>
+          </p:nvPr>
+        </p:nvSpPr>
+        <p:spPr/>
+      </p:sp>
+    </p:spTree>
+  </p:cSld>
+  <p:clrMapOvr>
+    <a:masterClrMapping/>
+  </p:clrMapOvr>
+</p:notes>
+</file>
+
+<file path=ppt/notesSlides/notesSlide7.xml><?xml version="1.0" encoding="utf-8"?>
+<p:notes xmlns:a="http://schemas.openxmlformats.org/drawingml/2006/main" xmlns:p="http://schemas.openxmlformats.org/presentationml/2006/main" xmlns:r="http://schemas.openxmlformats.org/officeDocument/2006/relationships">
+  <p:cSld>
+    <p:spTree>
+      <p:nvGrpSpPr>
+        <p:cNvPr id="1" name=""/>
+        <p:cNvGrpSpPr/>
+        <p:nvPr/>
+      </p:nvGrpSpPr>
+      <p:grpSpPr>
+        <a:xfrm>
+          <a:off x="0" y="0"/>
+          <a:ext cx="0" cy="0"/>
+          <a:chOff x="0" y="0"/>
+          <a:chExt cx="0" cy="0"/>
+        </a:xfrm>
+      </p:grpSpPr>
+      <p:sp>
+        <p:nvSpPr>
+          <p:cNvPr id="2" name="Slide Image Placeholder 1"/>
+          <p:cNvSpPr>
+            <a:spLocks noGrp="1"/>
+          </p:cNvSpPr>
+          <p:nvPr>
+            <p:ph type="sldImg" idx="2"/>
+          </p:nvPr>
+        </p:nvSpPr>
+        <p:spPr/>
+      </p:sp>
+      <p:sp>
+        <p:nvSpPr>
+          <p:cNvPr id="3" name="Notes Placeholder 2"/>
+          <p:cNvSpPr>
+            <a:spLocks noGrp="1"/>
+          </p:cNvSpPr>
+          <p:nvPr>
+            <p:ph type="body" idx="3" sz="quarter"/>
+          </p:nvPr>
+        </p:nvSpPr>
+        <p:spPr/>
+        <p:txBody>
+          <a:bodyPr/>
+          <a:lstStyle/>
+          <a:p>
+            <a:r>
+              <a:t>Section header — the team's own slides go after this one.</a:t>
+            </a:r>
+          </a:p>
+        </p:txBody>
+      </p:sp>
+      <p:sp>
+        <p:nvSpPr>
+          <p:cNvPr id="4" name="Slide Number Placeholder 3"/>
+          <p:cNvSpPr>
+            <a:spLocks noGrp="1"/>
+          </p:cNvSpPr>
+          <p:nvPr>
+            <p:ph type="sldNum" idx="5" sz="quarter"/>
+          </p:nvPr>
+        </p:nvSpPr>
+        <p:spPr/>
+      </p:sp>
+    </p:spTree>
+  </p:cSld>
+  <p:clrMapOvr>
+    <a:masterClrMapping/>
+  </p:clrMapOvr>
+</p:notes>
+</file>
+
+<file path=ppt/notesSlides/notesSlide8.xml><?xml version="1.0" encoding="utf-8"?>
 <p:notes xmlns:a="http://schemas.openxmlformats.org/drawingml/2006/main" xmlns:p="http://schemas.openxmlformats.org/presentationml/2006/main" xmlns:r="http://schemas.openxmlformats.org/officeDocument/2006/relationships">
   <p:cSld>
     <p:spTree>
@@ -4129,6 +4271,355 @@
 </p:sld>
 </file>
 
+<file path=ppt/slides/slide10.xml><?xml version="1.0" encoding="utf-8"?>
+<p:sld xmlns:a="http://schemas.openxmlformats.org/drawingml/2006/main" xmlns:p="http://schemas.openxmlformats.org/presentationml/2006/main" xmlns:r="http://schemas.openxmlformats.org/officeDocument/2006/relationships">
+  <p:cSld>
+    <p:bg>
+      <p:bgPr>
+        <a:solidFill>
+          <a:srgbClr val="0B0E14"/>
+        </a:solidFill>
+        <a:effectLst/>
+      </p:bgPr>
+    </p:bg>
+    <p:spTree>
+      <p:nvGrpSpPr>
+        <p:cNvPr id="1" name=""/>
+        <p:cNvGrpSpPr/>
+        <p:nvPr/>
+      </p:nvGrpSpPr>
+      <p:grpSpPr/>
+      <p:sp>
+        <p:nvSpPr>
+          <p:cNvPr id="2" name="TextBox 1"/>
+          <p:cNvSpPr txBox="1"/>
+          <p:nvPr/>
+        </p:nvSpPr>
+        <p:spPr>
+          <a:xfrm>
+            <a:off x="640080" y="502920"/>
+            <a:ext cx="10058400" cy="365760"/>
+          </a:xfrm>
+          <a:prstGeom prst="rect">
+            <a:avLst/>
+          </a:prstGeom>
+          <a:noFill/>
+        </p:spPr>
+        <p:txBody>
+          <a:bodyPr wrap="square" anchor="t">
+            <a:spAutoFit/>
+          </a:bodyPr>
+          <a:lstStyle/>
+          <a:p>
+            <a:pPr algn="l">
+              <a:lnSpc>
+                <a:spcPct val="100000"/>
+              </a:lnSpc>
+            </a:pPr>
+            <a:r>
+              <a:rPr sz="1300" b="1">
+                <a:solidFill>
+                  <a:srgbClr val="00FF41"/>
+                </a:solidFill>
+                <a:latin typeface="Courier New"/>
+              </a:rPr>
+              <a:t>SOURCES</a:t>
+            </a:r>
+          </a:p>
+        </p:txBody>
+      </p:sp>
+      <p:sp>
+        <p:nvSpPr>
+          <p:cNvPr id="3" name="Rectangle 2"/>
+          <p:cNvSpPr/>
+          <p:nvPr/>
+        </p:nvSpPr>
+        <p:spPr>
+          <a:xfrm>
+            <a:off x="640080" y="932688"/>
+            <a:ext cx="822960" cy="73152"/>
+          </a:xfrm>
+          <a:prstGeom prst="rect">
+            <a:avLst/>
+          </a:prstGeom>
+          <a:solidFill>
+            <a:srgbClr val="00FF41"/>
+          </a:solidFill>
+          <a:ln>
+            <a:noFill/>
+          </a:ln>
+          <a:effectLst/>
+        </p:spPr>
+        <p:style>
+          <a:lnRef idx="1">
+            <a:schemeClr val="accent1"/>
+          </a:lnRef>
+          <a:fillRef idx="3">
+            <a:schemeClr val="accent1"/>
+          </a:fillRef>
+          <a:effectRef idx="2">
+            <a:schemeClr val="accent1"/>
+          </a:effectRef>
+          <a:fontRef idx="minor">
+            <a:schemeClr val="lt1"/>
+          </a:fontRef>
+        </p:style>
+        <p:txBody>
+          <a:bodyPr rtlCol="0" anchor="ctr"/>
+          <a:lstStyle/>
+          <a:p>
+            <a:pPr algn="ctr"/>
+          </a:p>
+        </p:txBody>
+      </p:sp>
+      <p:sp>
+        <p:nvSpPr>
+          <p:cNvPr id="4" name="TextBox 3"/>
+          <p:cNvSpPr txBox="1"/>
+          <p:nvPr/>
+        </p:nvSpPr>
+        <p:spPr>
+          <a:xfrm>
+            <a:off x="640080" y="1188720"/>
+            <a:ext cx="10972800" cy="914400"/>
+          </a:xfrm>
+          <a:prstGeom prst="rect">
+            <a:avLst/>
+          </a:prstGeom>
+          <a:noFill/>
+        </p:spPr>
+        <p:txBody>
+          <a:bodyPr wrap="square" anchor="t">
+            <a:spAutoFit/>
+          </a:bodyPr>
+          <a:lstStyle/>
+          <a:p>
+            <a:pPr algn="l">
+              <a:lnSpc>
+                <a:spcPct val="100000"/>
+              </a:lnSpc>
+            </a:pPr>
+            <a:r>
+              <a:rPr sz="3200" b="1">
+                <a:solidFill>
+                  <a:srgbClr val="F5F7FA"/>
+                </a:solidFill>
+                <a:latin typeface="Arial"/>
+              </a:rPr>
+              <a:t>What we read</a:t>
+            </a:r>
+          </a:p>
+        </p:txBody>
+      </p:sp>
+      <p:sp>
+        <p:nvSpPr>
+          <p:cNvPr id="5" name="TextBox 4"/>
+          <p:cNvSpPr txBox="1"/>
+          <p:nvPr/>
+        </p:nvSpPr>
+        <p:spPr>
+          <a:xfrm>
+            <a:off x="658368" y="2377440"/>
+            <a:ext cx="10881360" cy="3108960"/>
+          </a:xfrm>
+          <a:prstGeom prst="rect">
+            <a:avLst/>
+          </a:prstGeom>
+          <a:noFill/>
+        </p:spPr>
+        <p:txBody>
+          <a:bodyPr wrap="square" anchor="t">
+            <a:spAutoFit/>
+          </a:bodyPr>
+          <a:lstStyle/>
+          <a:p>
+            <a:pPr algn="l">
+              <a:lnSpc>
+                <a:spcPct val="145000"/>
+              </a:lnSpc>
+            </a:pPr>
+            <a:r>
+              <a:rPr sz="1700" b="1">
+                <a:solidFill>
+                  <a:srgbClr val="00FF41"/>
+                </a:solidFill>
+                <a:latin typeface="Arial"/>
+              </a:rPr>
+              <a:t>•  </a:t>
+            </a:r>
+            <a:r>
+              <a:rPr sz="1700" b="0">
+                <a:solidFill>
+                  <a:srgbClr val="8A94A6"/>
+                </a:solidFill>
+                <a:latin typeface="Arial"/>
+              </a:rPr>
+              <a:t>Author, Year. Title. Where it appeared.  —  what it found</a:t>
+            </a:r>
+          </a:p>
+          <a:p>
+            <a:pPr algn="l">
+              <a:lnSpc>
+                <a:spcPct val="145000"/>
+              </a:lnSpc>
+            </a:pPr>
+            <a:r>
+              <a:rPr sz="1700" b="1">
+                <a:solidFill>
+                  <a:srgbClr val="00FF41"/>
+                </a:solidFill>
+                <a:latin typeface="Arial"/>
+              </a:rPr>
+              <a:t>•  </a:t>
+            </a:r>
+            <a:r>
+              <a:rPr sz="1700" b="0">
+                <a:solidFill>
+                  <a:srgbClr val="8A94A6"/>
+                </a:solidFill>
+                <a:latin typeface="Arial"/>
+              </a:rPr>
+              <a:t>Author, Year. Title. Where it appeared.  —  what it found</a:t>
+            </a:r>
+          </a:p>
+          <a:p>
+            <a:pPr algn="l">
+              <a:lnSpc>
+                <a:spcPct val="145000"/>
+              </a:lnSpc>
+            </a:pPr>
+            <a:r>
+              <a:rPr sz="1700" b="1">
+                <a:solidFill>
+                  <a:srgbClr val="00FF41"/>
+                </a:solidFill>
+                <a:latin typeface="Arial"/>
+              </a:rPr>
+              <a:t>•  </a:t>
+            </a:r>
+            <a:r>
+              <a:rPr sz="1700" b="0">
+                <a:solidFill>
+                  <a:srgbClr val="8A94A6"/>
+                </a:solidFill>
+                <a:latin typeface="Arial"/>
+              </a:rPr>
+              <a:t>Author, Year. Title. Where it appeared.  —  what it found</a:t>
+            </a:r>
+          </a:p>
+          <a:p>
+            <a:pPr algn="l">
+              <a:lnSpc>
+                <a:spcPct val="145000"/>
+              </a:lnSpc>
+            </a:pPr>
+            <a:r>
+              <a:rPr sz="1700" b="1">
+                <a:solidFill>
+                  <a:srgbClr val="00FF41"/>
+                </a:solidFill>
+                <a:latin typeface="Arial"/>
+              </a:rPr>
+              <a:t>•  </a:t>
+            </a:r>
+            <a:r>
+              <a:rPr sz="1700" b="0">
+                <a:solidFill>
+                  <a:srgbClr val="8A94A6"/>
+                </a:solidFill>
+                <a:latin typeface="Arial"/>
+              </a:rPr>
+              <a:t>Author, Year. Title. Where it appeared.  —  what it found</a:t>
+            </a:r>
+          </a:p>
+        </p:txBody>
+      </p:sp>
+      <p:sp>
+        <p:nvSpPr>
+          <p:cNvPr id="6" name="TextBox 5"/>
+          <p:cNvSpPr txBox="1"/>
+          <p:nvPr/>
+        </p:nvSpPr>
+        <p:spPr>
+          <a:xfrm>
+            <a:off x="658368" y="5715000"/>
+            <a:ext cx="10881360" cy="365760"/>
+          </a:xfrm>
+          <a:prstGeom prst="rect">
+            <a:avLst/>
+          </a:prstGeom>
+          <a:noFill/>
+        </p:spPr>
+        <p:txBody>
+          <a:bodyPr wrap="square" anchor="t">
+            <a:spAutoFit/>
+          </a:bodyPr>
+          <a:lstStyle/>
+          <a:p>
+            <a:pPr algn="l">
+              <a:lnSpc>
+                <a:spcPct val="100000"/>
+              </a:lnSpc>
+            </a:pPr>
+            <a:r>
+              <a:rPr sz="1300" b="0">
+                <a:solidFill>
+                  <a:srgbClr val="5A6474"/>
+                </a:solidFill>
+                <a:latin typeface="Courier New"/>
+              </a:rPr>
+              <a:t>Real papers only — never invent a citation.</a:t>
+            </a:r>
+          </a:p>
+        </p:txBody>
+      </p:sp>
+      <p:sp>
+        <p:nvSpPr>
+          <p:cNvPr id="7" name="TextBox 6"/>
+          <p:cNvSpPr txBox="1"/>
+          <p:nvPr/>
+        </p:nvSpPr>
+        <p:spPr>
+          <a:xfrm>
+            <a:off x="640080" y="6355080"/>
+            <a:ext cx="10972800" cy="365760"/>
+          </a:xfrm>
+          <a:prstGeom prst="rect">
+            <a:avLst/>
+          </a:prstGeom>
+          <a:noFill/>
+        </p:spPr>
+        <p:txBody>
+          <a:bodyPr wrap="square" anchor="t">
+            <a:spAutoFit/>
+          </a:bodyPr>
+          <a:lstStyle/>
+          <a:p>
+            <a:pPr algn="l">
+              <a:lnSpc>
+                <a:spcPct val="100000"/>
+              </a:lnSpc>
+            </a:pPr>
+            <a:r>
+              <a:rPr sz="1000" b="0">
+                <a:solidFill>
+                  <a:srgbClr val="5A6474"/>
+                </a:solidFill>
+                <a:latin typeface="Courier New"/>
+              </a:rPr>
+              <a:t>Value Verification · TECHIE 1121 · Cornell Tech · Tue Jul 28</a:t>
+            </a:r>
+          </a:p>
+        </p:txBody>
+      </p:sp>
+    </p:spTree>
+  </p:cSld>
+  <p:clrMapOvr>
+    <a:masterClrMapping/>
+  </p:clrMapOvr>
+</p:sld>
+</file>
+
 <file path=ppt/slides/slide2.xml><?xml version="1.0" encoding="utf-8"?>
 <p:sld xmlns:a="http://schemas.openxmlformats.org/drawingml/2006/main" xmlns:p="http://schemas.openxmlformats.org/presentationml/2006/main" xmlns:r="http://schemas.openxmlformats.org/officeDocument/2006/relationships">
   <p:cSld>
@@ -4337,7 +4828,7 @@
                 </a:solidFill>
                 <a:latin typeface="Arial"/>
               </a:rPr>
-              <a:t>Add your own slides AFTER each header. Don't delete the headers.</a:t>
+              <a:t>Sections 01, 02, 04, 05 are the TEAM's. Section 03 has one named slide per person — that one is graded individually.</a:t>
             </a:r>
           </a:p>
           <a:p>
@@ -4362,7 +4853,7 @@
                 </a:solidFill>
                 <a:latin typeface="Arial"/>
               </a:rPr>
-              <a:t>Evidence beats assertion: screenshots, numbers, quotes from what you actually observed.</a:t>
+              <a:t>Add your own slides AFTER each header. Don't delete the headers.</a:t>
             </a:r>
           </a:p>
           <a:p>
@@ -4387,7 +4878,57 @@
                 </a:solidFill>
                 <a:latin typeface="Arial"/>
               </a:rPr>
+              <a:t>Evidence beats assertion: screenshots, numbers, quotes from what you actually observed.</a:t>
+            </a:r>
+          </a:p>
+          <a:p>
+            <a:pPr algn="l">
+              <a:lnSpc>
+                <a:spcPct val="130000"/>
+              </a:lnSpc>
+            </a:pPr>
+            <a:r>
+              <a:rPr sz="1900" b="1">
+                <a:solidFill>
+                  <a:srgbClr val="00FF41"/>
+                </a:solidFill>
+                <a:latin typeface="Arial"/>
+              </a:rPr>
+              <a:t>•  </a:t>
+            </a:r>
+            <a:r>
+              <a:rPr sz="1900" b="0">
+                <a:solidFill>
+                  <a:srgbClr val="F5F7FA"/>
+                </a:solidFill>
+                <a:latin typeface="Arial"/>
+              </a:rPr>
               <a:t>Real citations only — if you can't find the paper, leave the claim out.</a:t>
+            </a:r>
+          </a:p>
+          <a:p>
+            <a:pPr algn="l">
+              <a:lnSpc>
+                <a:spcPct val="130000"/>
+              </a:lnSpc>
+            </a:pPr>
+            <a:r>
+              <a:rPr sz="1900" b="1">
+                <a:solidFill>
+                  <a:srgbClr val="00FF41"/>
+                </a:solidFill>
+                <a:latin typeface="Arial"/>
+              </a:rPr>
+              <a:t>•  </a:t>
+            </a:r>
+            <a:r>
+              <a:rPr sz="1900" b="0">
+                <a:solidFill>
+                  <a:srgbClr val="F5F7FA"/>
+                </a:solidFill>
+                <a:latin typeface="Arial"/>
+              </a:rPr>
+              <a:t>Your reflection is NOT a document — it goes in your own lane on the team FigJam canvas.</a:t>
             </a:r>
           </a:p>
           <a:p>
@@ -5334,7 +5875,7 @@
                 </a:solidFill>
                 <a:latin typeface="Arial"/>
               </a:rPr>
-              <a:t>What WORKS in the current prototype — with evidence.</a:t>
+              <a:t>Each team member presents their OWN slide — the named slides that follow.</a:t>
             </a:r>
           </a:p>
           <a:p>
@@ -5359,7 +5900,7 @@
                 </a:solidFill>
                 <a:latin typeface="Arial"/>
               </a:rPr>
-              <a:t>What does NOT work — with evidence. An evidenced 'it doesn't' beats a hopeful 'it does'.</a:t>
+              <a:t>What WORKS and what does NOT — with evidence. An evidenced 'it doesn't' beats a hopeful 'it does'.</a:t>
             </a:r>
           </a:p>
           <a:p>
@@ -5456,14 +5997,53 @@
       <p:grpSpPr/>
       <p:sp>
         <p:nvSpPr>
-          <p:cNvPr id="2" name="Rectangle 1"/>
+          <p:cNvPr id="2" name="TextBox 1"/>
+          <p:cNvSpPr txBox="1"/>
+          <p:nvPr/>
+        </p:nvSpPr>
+        <p:spPr>
+          <a:xfrm>
+            <a:off x="640080" y="502920"/>
+            <a:ext cx="10058400" cy="365760"/>
+          </a:xfrm>
+          <a:prstGeom prst="rect">
+            <a:avLst/>
+          </a:prstGeom>
+          <a:noFill/>
+        </p:spPr>
+        <p:txBody>
+          <a:bodyPr wrap="square" anchor="t">
+            <a:spAutoFit/>
+          </a:bodyPr>
+          <a:lstStyle/>
+          <a:p>
+            <a:pPr algn="l">
+              <a:lnSpc>
+                <a:spcPct val="100000"/>
+              </a:lnSpc>
+            </a:pPr>
+            <a:r>
+              <a:rPr sz="1300" b="1">
+                <a:solidFill>
+                  <a:srgbClr val="00FF41"/>
+                </a:solidFill>
+                <a:latin typeface="Courier New"/>
+              </a:rPr>
+              <a:t>03.1  ·  YOUR SECTION (graded individually)</a:t>
+            </a:r>
+          </a:p>
+        </p:txBody>
+      </p:sp>
+      <p:sp>
+        <p:nvSpPr>
+          <p:cNvPr id="3" name="Rectangle 2"/>
           <p:cNvSpPr/>
           <p:nvPr/>
         </p:nvSpPr>
         <p:spPr>
           <a:xfrm>
-            <a:off x="0" y="0"/>
-            <a:ext cx="256032" cy="6858000"/>
+            <a:off x="640080" y="932688"/>
+            <a:ext cx="822960" cy="73152"/>
           </a:xfrm>
           <a:prstGeom prst="rect">
             <a:avLst/>
@@ -5500,14 +6080,14 @@
       </p:sp>
       <p:sp>
         <p:nvSpPr>
-          <p:cNvPr id="3" name="TextBox 2"/>
+          <p:cNvPr id="4" name="TextBox 3"/>
           <p:cNvSpPr txBox="1"/>
           <p:nvPr/>
         </p:nvSpPr>
         <p:spPr>
           <a:xfrm>
-            <a:off x="822960" y="1417320"/>
-            <a:ext cx="2743200" cy="1097280"/>
+            <a:off x="640080" y="1170432"/>
+            <a:ext cx="10972800" cy="914400"/>
           </a:xfrm>
           <a:prstGeom prst="rect">
             <a:avLst/>
@@ -5526,27 +6106,27 @@
               </a:lnSpc>
             </a:pPr>
             <a:r>
-              <a:rPr sz="6400" b="1">
-                <a:solidFill>
-                  <a:srgbClr val="00FF41"/>
-                </a:solidFill>
-                <a:latin typeface="Courier New"/>
-              </a:rPr>
-              <a:t>04</a:t>
-            </a:r>
-          </a:p>
-        </p:txBody>
-      </p:sp>
-      <p:sp>
-        <p:nvSpPr>
-          <p:cNvPr id="4" name="TextBox 3"/>
+              <a:rPr sz="3600" b="1">
+                <a:solidFill>
+                  <a:srgbClr val="F5F7FA"/>
+                </a:solidFill>
+                <a:latin typeface="Arial"/>
+              </a:rPr>
+              <a:t>Sebastien Gournay</a:t>
+            </a:r>
+          </a:p>
+        </p:txBody>
+      </p:sp>
+      <p:sp>
+        <p:nvSpPr>
+          <p:cNvPr id="5" name="TextBox 4"/>
           <p:cNvSpPr txBox="1"/>
           <p:nvPr/>
         </p:nvSpPr>
         <p:spPr>
           <a:xfrm>
-            <a:off x="841248" y="2487168"/>
-            <a:ext cx="10424160" cy="457200"/>
+            <a:off x="658368" y="2286000"/>
+            <a:ext cx="10881360" cy="2834640"/>
           </a:xfrm>
           <a:prstGeom prst="rect">
             <a:avLst/>
@@ -5555,6 +6135,175 @@
         </p:spPr>
         <p:txBody>
           <a:bodyPr wrap="square" anchor="t">
+            <a:spAutoFit/>
+          </a:bodyPr>
+          <a:lstStyle/>
+          <a:p>
+            <a:pPr algn="l">
+              <a:lnSpc>
+                <a:spcPct val="134000"/>
+              </a:lnSpc>
+            </a:pPr>
+            <a:r>
+              <a:rPr sz="1900" b="1">
+                <a:solidFill>
+                  <a:srgbClr val="00FF41"/>
+                </a:solidFill>
+                <a:latin typeface="Arial"/>
+              </a:rPr>
+              <a:t>→  </a:t>
+            </a:r>
+            <a:r>
+              <a:rPr sz="1900" b="0">
+                <a:solidFill>
+                  <a:srgbClr val="F5F7FA"/>
+                </a:solidFill>
+                <a:latin typeface="Arial"/>
+              </a:rPr>
+              <a:t>The lens + method I ran, and why our reading demanded it</a:t>
+            </a:r>
+          </a:p>
+          <a:p>
+            <a:pPr algn="l">
+              <a:lnSpc>
+                <a:spcPct val="134000"/>
+              </a:lnSpc>
+            </a:pPr>
+            <a:r>
+              <a:rPr sz="1900" b="1">
+                <a:solidFill>
+                  <a:srgbClr val="00FF41"/>
+                </a:solidFill>
+                <a:latin typeface="Arial"/>
+              </a:rPr>
+              <a:t>→  </a:t>
+            </a:r>
+            <a:r>
+              <a:rPr sz="1900" b="0">
+                <a:solidFill>
+                  <a:srgbClr val="F5F7FA"/>
+                </a:solidFill>
+                <a:latin typeface="Arial"/>
+              </a:rPr>
+              <a:t>My evidence - what I actually observed or measured</a:t>
+            </a:r>
+          </a:p>
+          <a:p>
+            <a:pPr algn="l">
+              <a:lnSpc>
+                <a:spcPct val="134000"/>
+              </a:lnSpc>
+            </a:pPr>
+            <a:r>
+              <a:rPr sz="1900" b="1">
+                <a:solidFill>
+                  <a:srgbClr val="00FF41"/>
+                </a:solidFill>
+                <a:latin typeface="Arial"/>
+              </a:rPr>
+              <a:t>→  </a:t>
+            </a:r>
+            <a:r>
+              <a:rPr sz="1900" b="0">
+                <a:solidFill>
+                  <a:srgbClr val="F5F7FA"/>
+                </a:solidFill>
+                <a:latin typeface="Arial"/>
+              </a:rPr>
+              <a:t>What this says WORKS - and what does NOT</a:t>
+            </a:r>
+          </a:p>
+          <a:p>
+            <a:pPr algn="l">
+              <a:lnSpc>
+                <a:spcPct val="134000"/>
+              </a:lnSpc>
+            </a:pPr>
+            <a:r>
+              <a:rPr sz="1900" b="1">
+                <a:solidFill>
+                  <a:srgbClr val="00FF41"/>
+                </a:solidFill>
+                <a:latin typeface="Arial"/>
+              </a:rPr>
+              <a:t>→  </a:t>
+            </a:r>
+            <a:r>
+              <a:rPr sz="1900" b="0">
+                <a:solidFill>
+                  <a:srgbClr val="F5F7FA"/>
+                </a:solidFill>
+                <a:latin typeface="Arial"/>
+              </a:rPr>
+              <a:t>The paper I found (real citation) and what it changes</a:t>
+            </a:r>
+          </a:p>
+        </p:txBody>
+      </p:sp>
+      <p:sp>
+        <p:nvSpPr>
+          <p:cNvPr id="6" name="Rounded Rectangle 5"/>
+          <p:cNvSpPr/>
+          <p:nvPr/>
+        </p:nvSpPr>
+        <p:spPr>
+          <a:xfrm>
+            <a:off x="640080" y="5440680"/>
+            <a:ext cx="10881360" cy="658368"/>
+          </a:xfrm>
+          <a:prstGeom prst="roundRect">
+            <a:avLst/>
+          </a:prstGeom>
+          <a:solidFill>
+            <a:srgbClr val="151B26"/>
+          </a:solidFill>
+          <a:ln w="19050">
+            <a:solidFill>
+              <a:srgbClr val="00FF41"/>
+            </a:solidFill>
+          </a:ln>
+          <a:effectLst/>
+        </p:spPr>
+        <p:style>
+          <a:lnRef idx="1">
+            <a:schemeClr val="accent1"/>
+          </a:lnRef>
+          <a:fillRef idx="3">
+            <a:schemeClr val="accent1"/>
+          </a:fillRef>
+          <a:effectRef idx="2">
+            <a:schemeClr val="accent1"/>
+          </a:effectRef>
+          <a:fontRef idx="minor">
+            <a:schemeClr val="lt1"/>
+          </a:fontRef>
+        </p:style>
+        <p:txBody>
+          <a:bodyPr rtlCol="0" anchor="ctr"/>
+          <a:lstStyle/>
+          <a:p>
+            <a:pPr algn="ctr"/>
+          </a:p>
+        </p:txBody>
+      </p:sp>
+      <p:sp>
+        <p:nvSpPr>
+          <p:cNvPr id="7" name="TextBox 6"/>
+          <p:cNvSpPr txBox="1"/>
+          <p:nvPr/>
+        </p:nvSpPr>
+        <p:spPr>
+          <a:xfrm>
+            <a:off x="914400" y="5440680"/>
+            <a:ext cx="10332720" cy="658368"/>
+          </a:xfrm>
+          <a:prstGeom prst="rect">
+            <a:avLst/>
+          </a:prstGeom>
+          <a:noFill/>
+        </p:spPr>
+        <p:txBody>
+          <a:bodyPr wrap="square" anchor="ctr">
             <a:spAutoFit/>
           </a:bodyPr>
           <a:lstStyle/>
@@ -5565,157 +6314,29 @@
               </a:lnSpc>
             </a:pPr>
             <a:r>
+              <a:rPr sz="1600" b="1">
+                <a:solidFill>
+                  <a:srgbClr val="00FF41"/>
+                </a:solidFill>
+                <a:latin typeface="Arial"/>
+              </a:rPr>
+              <a:t>▸  </a:t>
+            </a:r>
+            <a:r>
               <a:rPr sz="1500" b="1">
                 <a:solidFill>
-                  <a:srgbClr val="00FF41"/>
-                </a:solidFill>
-                <a:latin typeface="Courier New"/>
-              </a:rPr>
-              <a:t>PART 3 — OUTLOOK</a:t>
-            </a:r>
-          </a:p>
-        </p:txBody>
-      </p:sp>
-      <p:sp>
-        <p:nvSpPr>
-          <p:cNvPr id="5" name="TextBox 4"/>
-          <p:cNvSpPr txBox="1"/>
-          <p:nvPr/>
-        </p:nvSpPr>
-        <p:spPr>
-          <a:xfrm>
-            <a:off x="804672" y="2971800"/>
-            <a:ext cx="10607040" cy="1097280"/>
-          </a:xfrm>
-          <a:prstGeom prst="rect">
-            <a:avLst/>
-          </a:prstGeom>
-          <a:noFill/>
-        </p:spPr>
-        <p:txBody>
-          <a:bodyPr wrap="square" anchor="t">
-            <a:spAutoFit/>
-          </a:bodyPr>
-          <a:lstStyle/>
-          <a:p>
-            <a:pPr algn="l">
-              <a:lnSpc>
-                <a:spcPct val="103000"/>
-              </a:lnSpc>
-            </a:pPr>
-            <a:r>
-              <a:rPr sz="3800" b="1">
-                <a:solidFill>
                   <a:srgbClr val="F5F7FA"/>
                 </a:solidFill>
                 <a:latin typeface="Arial"/>
               </a:rPr>
-              <a:t>What related research has already found</a:t>
-            </a:r>
-          </a:p>
-        </p:txBody>
-      </p:sp>
-      <p:sp>
-        <p:nvSpPr>
-          <p:cNvPr id="6" name="TextBox 5"/>
-          <p:cNvSpPr txBox="1"/>
-          <p:nvPr/>
-        </p:nvSpPr>
-        <p:spPr>
-          <a:xfrm>
-            <a:off x="841248" y="4224528"/>
-            <a:ext cx="10424160" cy="1737360"/>
-          </a:xfrm>
-          <a:prstGeom prst="rect">
-            <a:avLst/>
-          </a:prstGeom>
-          <a:noFill/>
-        </p:spPr>
-        <p:txBody>
-          <a:bodyPr wrap="square" anchor="t">
-            <a:spAutoFit/>
-          </a:bodyPr>
-          <a:lstStyle/>
-          <a:p>
-            <a:pPr algn="l">
-              <a:lnSpc>
-                <a:spcPct val="128000"/>
-              </a:lnSpc>
-            </a:pPr>
-            <a:r>
-              <a:rPr sz="1700" b="1">
-                <a:solidFill>
-                  <a:srgbClr val="00FF41"/>
-                </a:solidFill>
-                <a:latin typeface="Arial"/>
-              </a:rPr>
-              <a:t>→  </a:t>
-            </a:r>
-            <a:r>
-              <a:rPr sz="1700" b="0">
-                <a:solidFill>
-                  <a:srgbClr val="8A94A6"/>
-                </a:solidFill>
-                <a:latin typeface="Arial"/>
-              </a:rPr>
-              <a:t>What have others tried in order to move this value?</a:t>
-            </a:r>
-          </a:p>
-          <a:p>
-            <a:pPr algn="l">
-              <a:lnSpc>
-                <a:spcPct val="128000"/>
-              </a:lnSpc>
-            </a:pPr>
-            <a:r>
-              <a:rPr sz="1700" b="1">
-                <a:solidFill>
-                  <a:srgbClr val="00FF41"/>
-                </a:solidFill>
-                <a:latin typeface="Arial"/>
-              </a:rPr>
-              <a:t>→  </a:t>
-            </a:r>
-            <a:r>
-              <a:rPr sz="1700" b="0">
-                <a:solidFill>
-                  <a:srgbClr val="8A94A6"/>
-                </a:solidFill>
-                <a:latin typeface="Arial"/>
-              </a:rPr>
-              <a:t>What worked — and what failed?</a:t>
-            </a:r>
-          </a:p>
-          <a:p>
-            <a:pPr algn="l">
-              <a:lnSpc>
-                <a:spcPct val="128000"/>
-              </a:lnSpc>
-            </a:pPr>
-            <a:r>
-              <a:rPr sz="1700" b="1">
-                <a:solidFill>
-                  <a:srgbClr val="00FF41"/>
-                </a:solidFill>
-                <a:latin typeface="Arial"/>
-              </a:rPr>
-              <a:t>→  </a:t>
-            </a:r>
-            <a:r>
-              <a:rPr sz="1700" b="0">
-                <a:solidFill>
-                  <a:srgbClr val="8A94A6"/>
-                </a:solidFill>
-                <a:latin typeface="Arial"/>
-              </a:rPr>
-              <a:t>2–3 REAL sources. Never invent a citation.</a:t>
-            </a:r>
-          </a:p>
-        </p:txBody>
-      </p:sp>
-      <p:sp>
-        <p:nvSpPr>
-          <p:cNvPr id="7" name="TextBox 6"/>
+              <a:t>This slide is yours. Add more slides behind it if you need them - keep your name on them.</a:t>
+            </a:r>
+          </a:p>
+        </p:txBody>
+      </p:sp>
+      <p:sp>
+        <p:nvSpPr>
+          <p:cNvPr id="8" name="TextBox 7"/>
           <p:cNvSpPr txBox="1"/>
           <p:nvPr/>
         </p:nvSpPr>
@@ -5780,14 +6401,53 @@
       <p:grpSpPr/>
       <p:sp>
         <p:nvSpPr>
-          <p:cNvPr id="2" name="Rectangle 1"/>
+          <p:cNvPr id="2" name="TextBox 1"/>
+          <p:cNvSpPr txBox="1"/>
+          <p:nvPr/>
+        </p:nvSpPr>
+        <p:spPr>
+          <a:xfrm>
+            <a:off x="640080" y="502920"/>
+            <a:ext cx="10058400" cy="365760"/>
+          </a:xfrm>
+          <a:prstGeom prst="rect">
+            <a:avLst/>
+          </a:prstGeom>
+          <a:noFill/>
+        </p:spPr>
+        <p:txBody>
+          <a:bodyPr wrap="square" anchor="t">
+            <a:spAutoFit/>
+          </a:bodyPr>
+          <a:lstStyle/>
+          <a:p>
+            <a:pPr algn="l">
+              <a:lnSpc>
+                <a:spcPct val="100000"/>
+              </a:lnSpc>
+            </a:pPr>
+            <a:r>
+              <a:rPr sz="1300" b="1">
+                <a:solidFill>
+                  <a:srgbClr val="00FF41"/>
+                </a:solidFill>
+                <a:latin typeface="Courier New"/>
+              </a:rPr>
+              <a:t>03.2  ·  YOUR SECTION (graded individually)</a:t>
+            </a:r>
+          </a:p>
+        </p:txBody>
+      </p:sp>
+      <p:sp>
+        <p:nvSpPr>
+          <p:cNvPr id="3" name="Rectangle 2"/>
           <p:cNvSpPr/>
           <p:nvPr/>
         </p:nvSpPr>
         <p:spPr>
           <a:xfrm>
-            <a:off x="0" y="0"/>
-            <a:ext cx="256032" cy="6858000"/>
+            <a:off x="640080" y="932688"/>
+            <a:ext cx="822960" cy="73152"/>
           </a:xfrm>
           <a:prstGeom prst="rect">
             <a:avLst/>
@@ -5824,14 +6484,14 @@
       </p:sp>
       <p:sp>
         <p:nvSpPr>
-          <p:cNvPr id="3" name="TextBox 2"/>
+          <p:cNvPr id="4" name="TextBox 3"/>
           <p:cNvSpPr txBox="1"/>
           <p:nvPr/>
         </p:nvSpPr>
         <p:spPr>
           <a:xfrm>
-            <a:off x="822960" y="1417320"/>
-            <a:ext cx="2743200" cy="1097280"/>
+            <a:off x="640080" y="1170432"/>
+            <a:ext cx="10972800" cy="914400"/>
           </a:xfrm>
           <a:prstGeom prst="rect">
             <a:avLst/>
@@ -5850,27 +6510,27 @@
               </a:lnSpc>
             </a:pPr>
             <a:r>
-              <a:rPr sz="6400" b="1">
-                <a:solidFill>
-                  <a:srgbClr val="00FF41"/>
-                </a:solidFill>
-                <a:latin typeface="Courier New"/>
-              </a:rPr>
-              <a:t>05</a:t>
-            </a:r>
-          </a:p>
-        </p:txBody>
-      </p:sp>
-      <p:sp>
-        <p:nvSpPr>
-          <p:cNvPr id="4" name="TextBox 3"/>
+              <a:rPr sz="3600" b="1">
+                <a:solidFill>
+                  <a:srgbClr val="F5F7FA"/>
+                </a:solidFill>
+                <a:latin typeface="Arial"/>
+              </a:rPr>
+              <a:t>Justin Ou</a:t>
+            </a:r>
+          </a:p>
+        </p:txBody>
+      </p:sp>
+      <p:sp>
+        <p:nvSpPr>
+          <p:cNvPr id="5" name="TextBox 4"/>
           <p:cNvSpPr txBox="1"/>
           <p:nvPr/>
         </p:nvSpPr>
         <p:spPr>
           <a:xfrm>
-            <a:off x="841248" y="2487168"/>
-            <a:ext cx="10424160" cy="457200"/>
+            <a:off x="658368" y="2286000"/>
+            <a:ext cx="10881360" cy="2834640"/>
           </a:xfrm>
           <a:prstGeom prst="rect">
             <a:avLst/>
@@ -5879,6 +6539,175 @@
         </p:spPr>
         <p:txBody>
           <a:bodyPr wrap="square" anchor="t">
+            <a:spAutoFit/>
+          </a:bodyPr>
+          <a:lstStyle/>
+          <a:p>
+            <a:pPr algn="l">
+              <a:lnSpc>
+                <a:spcPct val="134000"/>
+              </a:lnSpc>
+            </a:pPr>
+            <a:r>
+              <a:rPr sz="1900" b="1">
+                <a:solidFill>
+                  <a:srgbClr val="00FF41"/>
+                </a:solidFill>
+                <a:latin typeface="Arial"/>
+              </a:rPr>
+              <a:t>→  </a:t>
+            </a:r>
+            <a:r>
+              <a:rPr sz="1900" b="0">
+                <a:solidFill>
+                  <a:srgbClr val="F5F7FA"/>
+                </a:solidFill>
+                <a:latin typeface="Arial"/>
+              </a:rPr>
+              <a:t>The lens + method I ran, and why our reading demanded it</a:t>
+            </a:r>
+          </a:p>
+          <a:p>
+            <a:pPr algn="l">
+              <a:lnSpc>
+                <a:spcPct val="134000"/>
+              </a:lnSpc>
+            </a:pPr>
+            <a:r>
+              <a:rPr sz="1900" b="1">
+                <a:solidFill>
+                  <a:srgbClr val="00FF41"/>
+                </a:solidFill>
+                <a:latin typeface="Arial"/>
+              </a:rPr>
+              <a:t>→  </a:t>
+            </a:r>
+            <a:r>
+              <a:rPr sz="1900" b="0">
+                <a:solidFill>
+                  <a:srgbClr val="F5F7FA"/>
+                </a:solidFill>
+                <a:latin typeface="Arial"/>
+              </a:rPr>
+              <a:t>My evidence - what I actually observed or measured</a:t>
+            </a:r>
+          </a:p>
+          <a:p>
+            <a:pPr algn="l">
+              <a:lnSpc>
+                <a:spcPct val="134000"/>
+              </a:lnSpc>
+            </a:pPr>
+            <a:r>
+              <a:rPr sz="1900" b="1">
+                <a:solidFill>
+                  <a:srgbClr val="00FF41"/>
+                </a:solidFill>
+                <a:latin typeface="Arial"/>
+              </a:rPr>
+              <a:t>→  </a:t>
+            </a:r>
+            <a:r>
+              <a:rPr sz="1900" b="0">
+                <a:solidFill>
+                  <a:srgbClr val="F5F7FA"/>
+                </a:solidFill>
+                <a:latin typeface="Arial"/>
+              </a:rPr>
+              <a:t>What this says WORKS - and what does NOT</a:t>
+            </a:r>
+          </a:p>
+          <a:p>
+            <a:pPr algn="l">
+              <a:lnSpc>
+                <a:spcPct val="134000"/>
+              </a:lnSpc>
+            </a:pPr>
+            <a:r>
+              <a:rPr sz="1900" b="1">
+                <a:solidFill>
+                  <a:srgbClr val="00FF41"/>
+                </a:solidFill>
+                <a:latin typeface="Arial"/>
+              </a:rPr>
+              <a:t>→  </a:t>
+            </a:r>
+            <a:r>
+              <a:rPr sz="1900" b="0">
+                <a:solidFill>
+                  <a:srgbClr val="F5F7FA"/>
+                </a:solidFill>
+                <a:latin typeface="Arial"/>
+              </a:rPr>
+              <a:t>The paper I found (real citation) and what it changes</a:t>
+            </a:r>
+          </a:p>
+        </p:txBody>
+      </p:sp>
+      <p:sp>
+        <p:nvSpPr>
+          <p:cNvPr id="6" name="Rounded Rectangle 5"/>
+          <p:cNvSpPr/>
+          <p:nvPr/>
+        </p:nvSpPr>
+        <p:spPr>
+          <a:xfrm>
+            <a:off x="640080" y="5440680"/>
+            <a:ext cx="10881360" cy="658368"/>
+          </a:xfrm>
+          <a:prstGeom prst="roundRect">
+            <a:avLst/>
+          </a:prstGeom>
+          <a:solidFill>
+            <a:srgbClr val="151B26"/>
+          </a:solidFill>
+          <a:ln w="19050">
+            <a:solidFill>
+              <a:srgbClr val="00FF41"/>
+            </a:solidFill>
+          </a:ln>
+          <a:effectLst/>
+        </p:spPr>
+        <p:style>
+          <a:lnRef idx="1">
+            <a:schemeClr val="accent1"/>
+          </a:lnRef>
+          <a:fillRef idx="3">
+            <a:schemeClr val="accent1"/>
+          </a:fillRef>
+          <a:effectRef idx="2">
+            <a:schemeClr val="accent1"/>
+          </a:effectRef>
+          <a:fontRef idx="minor">
+            <a:schemeClr val="lt1"/>
+          </a:fontRef>
+        </p:style>
+        <p:txBody>
+          <a:bodyPr rtlCol="0" anchor="ctr"/>
+          <a:lstStyle/>
+          <a:p>
+            <a:pPr algn="ctr"/>
+          </a:p>
+        </p:txBody>
+      </p:sp>
+      <p:sp>
+        <p:nvSpPr>
+          <p:cNvPr id="7" name="TextBox 6"/>
+          <p:cNvSpPr txBox="1"/>
+          <p:nvPr/>
+        </p:nvSpPr>
+        <p:spPr>
+          <a:xfrm>
+            <a:off x="914400" y="5440680"/>
+            <a:ext cx="10332720" cy="658368"/>
+          </a:xfrm>
+          <a:prstGeom prst="rect">
+            <a:avLst/>
+          </a:prstGeom>
+          <a:noFill/>
+        </p:spPr>
+        <p:txBody>
+          <a:bodyPr wrap="square" anchor="ctr">
             <a:spAutoFit/>
           </a:bodyPr>
           <a:lstStyle/>
@@ -5889,157 +6718,29 @@
               </a:lnSpc>
             </a:pPr>
             <a:r>
+              <a:rPr sz="1600" b="1">
+                <a:solidFill>
+                  <a:srgbClr val="00FF41"/>
+                </a:solidFill>
+                <a:latin typeface="Arial"/>
+              </a:rPr>
+              <a:t>▸  </a:t>
+            </a:r>
+            <a:r>
               <a:rPr sz="1500" b="1">
                 <a:solidFill>
-                  <a:srgbClr val="00FF41"/>
-                </a:solidFill>
-                <a:latin typeface="Courier New"/>
-              </a:rPr>
-              <a:t>SO WHAT</a:t>
-            </a:r>
-          </a:p>
-        </p:txBody>
-      </p:sp>
-      <p:sp>
-        <p:nvSpPr>
-          <p:cNvPr id="5" name="TextBox 4"/>
-          <p:cNvSpPr txBox="1"/>
-          <p:nvPr/>
-        </p:nvSpPr>
-        <p:spPr>
-          <a:xfrm>
-            <a:off x="804672" y="2971800"/>
-            <a:ext cx="10607040" cy="1097280"/>
-          </a:xfrm>
-          <a:prstGeom prst="rect">
-            <a:avLst/>
-          </a:prstGeom>
-          <a:noFill/>
-        </p:spPr>
-        <p:txBody>
-          <a:bodyPr wrap="square" anchor="t">
-            <a:spAutoFit/>
-          </a:bodyPr>
-          <a:lstStyle/>
-          <a:p>
-            <a:pPr algn="l">
-              <a:lnSpc>
-                <a:spcPct val="103000"/>
-              </a:lnSpc>
-            </a:pPr>
-            <a:r>
-              <a:rPr sz="3800" b="1">
-                <a:solidFill>
                   <a:srgbClr val="F5F7FA"/>
                 </a:solidFill>
                 <a:latin typeface="Arial"/>
               </a:rPr>
-              <a:t>Our next design brief</a:t>
-            </a:r>
-          </a:p>
-        </p:txBody>
-      </p:sp>
-      <p:sp>
-        <p:nvSpPr>
-          <p:cNvPr id="6" name="TextBox 5"/>
-          <p:cNvSpPr txBox="1"/>
-          <p:nvPr/>
-        </p:nvSpPr>
-        <p:spPr>
-          <a:xfrm>
-            <a:off x="841248" y="4224528"/>
-            <a:ext cx="10424160" cy="1737360"/>
-          </a:xfrm>
-          <a:prstGeom prst="rect">
-            <a:avLst/>
-          </a:prstGeom>
-          <a:noFill/>
-        </p:spPr>
-        <p:txBody>
-          <a:bodyPr wrap="square" anchor="t">
-            <a:spAutoFit/>
-          </a:bodyPr>
-          <a:lstStyle/>
-          <a:p>
-            <a:pPr algn="l">
-              <a:lnSpc>
-                <a:spcPct val="128000"/>
-              </a:lnSpc>
-            </a:pPr>
-            <a:r>
-              <a:rPr sz="1700" b="1">
-                <a:solidFill>
-                  <a:srgbClr val="00FF41"/>
-                </a:solidFill>
-                <a:latin typeface="Arial"/>
-              </a:rPr>
-              <a:t>→  </a:t>
-            </a:r>
-            <a:r>
-              <a:rPr sz="1700" b="0">
-                <a:solidFill>
-                  <a:srgbClr val="8A94A6"/>
-                </a:solidFill>
-                <a:latin typeface="Arial"/>
-              </a:rPr>
-              <a:t>Verification is a beginning, not a verdict.</a:t>
-            </a:r>
-          </a:p>
-          <a:p>
-            <a:pPr algn="l">
-              <a:lnSpc>
-                <a:spcPct val="128000"/>
-              </a:lnSpc>
-            </a:pPr>
-            <a:r>
-              <a:rPr sz="1700" b="1">
-                <a:solidFill>
-                  <a:srgbClr val="00FF41"/>
-                </a:solidFill>
-                <a:latin typeface="Arial"/>
-              </a:rPr>
-              <a:t>→  </a:t>
-            </a:r>
-            <a:r>
-              <a:rPr sz="1700" b="0">
-                <a:solidFill>
-                  <a:srgbClr val="8A94A6"/>
-                </a:solidFill>
-                <a:latin typeface="Arial"/>
-              </a:rPr>
-              <a:t>What OTHER design could actually achieve this value?</a:t>
-            </a:r>
-          </a:p>
-          <a:p>
-            <a:pPr algn="l">
-              <a:lnSpc>
-                <a:spcPct val="128000"/>
-              </a:lnSpc>
-            </a:pPr>
-            <a:r>
-              <a:rPr sz="1700" b="1">
-                <a:solidFill>
-                  <a:srgbClr val="00FF41"/>
-                </a:solidFill>
-                <a:latin typeface="Arial"/>
-              </a:rPr>
-              <a:t>→  </a:t>
-            </a:r>
-            <a:r>
-              <a:rPr sz="1700" b="0">
-                <a:solidFill>
-                  <a:srgbClr val="8A94A6"/>
-                </a:solidFill>
-                <a:latin typeface="Arial"/>
-              </a:rPr>
-              <a:t>What should the next cycle discover? (You carry this into Wednesday.)</a:t>
-            </a:r>
-          </a:p>
-        </p:txBody>
-      </p:sp>
-      <p:sp>
-        <p:nvSpPr>
-          <p:cNvPr id="7" name="TextBox 6"/>
+              <a:t>This slide is yours. Add more slides behind it if you need them - keep your name on them.</a:t>
+            </a:r>
+          </a:p>
+        </p:txBody>
+      </p:sp>
+      <p:sp>
+        <p:nvSpPr>
+          <p:cNvPr id="8" name="TextBox 7"/>
           <p:cNvSpPr txBox="1"/>
           <p:nvPr/>
         </p:nvSpPr>
@@ -6104,53 +6805,14 @@
       <p:grpSpPr/>
       <p:sp>
         <p:nvSpPr>
-          <p:cNvPr id="2" name="TextBox 1"/>
-          <p:cNvSpPr txBox="1"/>
-          <p:nvPr/>
-        </p:nvSpPr>
-        <p:spPr>
-          <a:xfrm>
-            <a:off x="640080" y="502920"/>
-            <a:ext cx="10058400" cy="365760"/>
-          </a:xfrm>
-          <a:prstGeom prst="rect">
-            <a:avLst/>
-          </a:prstGeom>
-          <a:noFill/>
-        </p:spPr>
-        <p:txBody>
-          <a:bodyPr wrap="square" anchor="t">
-            <a:spAutoFit/>
-          </a:bodyPr>
-          <a:lstStyle/>
-          <a:p>
-            <a:pPr algn="l">
-              <a:lnSpc>
-                <a:spcPct val="100000"/>
-              </a:lnSpc>
-            </a:pPr>
-            <a:r>
-              <a:rPr sz="1300" b="1">
-                <a:solidFill>
-                  <a:srgbClr val="00FF41"/>
-                </a:solidFill>
-                <a:latin typeface="Courier New"/>
-              </a:rPr>
-              <a:t>SOURCES</a:t>
-            </a:r>
-          </a:p>
-        </p:txBody>
-      </p:sp>
-      <p:sp>
-        <p:nvSpPr>
-          <p:cNvPr id="3" name="Rectangle 2"/>
+          <p:cNvPr id="2" name="Rectangle 1"/>
           <p:cNvSpPr/>
           <p:nvPr/>
         </p:nvSpPr>
         <p:spPr>
           <a:xfrm>
-            <a:off x="640080" y="932688"/>
-            <a:ext cx="822960" cy="73152"/>
+            <a:off x="0" y="0"/>
+            <a:ext cx="256032" cy="6858000"/>
           </a:xfrm>
           <a:prstGeom prst="rect">
             <a:avLst/>
@@ -6187,14 +6849,14 @@
       </p:sp>
       <p:sp>
         <p:nvSpPr>
-          <p:cNvPr id="4" name="TextBox 3"/>
+          <p:cNvPr id="3" name="TextBox 2"/>
           <p:cNvSpPr txBox="1"/>
           <p:nvPr/>
         </p:nvSpPr>
         <p:spPr>
           <a:xfrm>
-            <a:off x="640080" y="1188720"/>
-            <a:ext cx="10972800" cy="914400"/>
+            <a:off x="822960" y="1417320"/>
+            <a:ext cx="2743200" cy="1097280"/>
           </a:xfrm>
           <a:prstGeom prst="rect">
             <a:avLst/>
@@ -6213,150 +6875,27 @@
               </a:lnSpc>
             </a:pPr>
             <a:r>
-              <a:rPr sz="3200" b="1">
-                <a:solidFill>
-                  <a:srgbClr val="F5F7FA"/>
-                </a:solidFill>
-                <a:latin typeface="Arial"/>
-              </a:rPr>
-              <a:t>What we read</a:t>
-            </a:r>
-          </a:p>
-        </p:txBody>
-      </p:sp>
-      <p:sp>
-        <p:nvSpPr>
-          <p:cNvPr id="5" name="TextBox 4"/>
+              <a:rPr sz="6400" b="1">
+                <a:solidFill>
+                  <a:srgbClr val="00FF41"/>
+                </a:solidFill>
+                <a:latin typeface="Courier New"/>
+              </a:rPr>
+              <a:t>04</a:t>
+            </a:r>
+          </a:p>
+        </p:txBody>
+      </p:sp>
+      <p:sp>
+        <p:nvSpPr>
+          <p:cNvPr id="4" name="TextBox 3"/>
           <p:cNvSpPr txBox="1"/>
           <p:nvPr/>
         </p:nvSpPr>
         <p:spPr>
           <a:xfrm>
-            <a:off x="658368" y="2377440"/>
-            <a:ext cx="10881360" cy="3108960"/>
-          </a:xfrm>
-          <a:prstGeom prst="rect">
-            <a:avLst/>
-          </a:prstGeom>
-          <a:noFill/>
-        </p:spPr>
-        <p:txBody>
-          <a:bodyPr wrap="square" anchor="t">
-            <a:spAutoFit/>
-          </a:bodyPr>
-          <a:lstStyle/>
-          <a:p>
-            <a:pPr algn="l">
-              <a:lnSpc>
-                <a:spcPct val="145000"/>
-              </a:lnSpc>
-            </a:pPr>
-            <a:r>
-              <a:rPr sz="1700" b="1">
-                <a:solidFill>
-                  <a:srgbClr val="00FF41"/>
-                </a:solidFill>
-                <a:latin typeface="Arial"/>
-              </a:rPr>
-              <a:t>•  </a:t>
-            </a:r>
-            <a:r>
-              <a:rPr sz="1700" b="0">
-                <a:solidFill>
-                  <a:srgbClr val="8A94A6"/>
-                </a:solidFill>
-                <a:latin typeface="Arial"/>
-              </a:rPr>
-              <a:t>Author, Year. Title. Where it appeared.  —  what it found</a:t>
-            </a:r>
-          </a:p>
-          <a:p>
-            <a:pPr algn="l">
-              <a:lnSpc>
-                <a:spcPct val="145000"/>
-              </a:lnSpc>
-            </a:pPr>
-            <a:r>
-              <a:rPr sz="1700" b="1">
-                <a:solidFill>
-                  <a:srgbClr val="00FF41"/>
-                </a:solidFill>
-                <a:latin typeface="Arial"/>
-              </a:rPr>
-              <a:t>•  </a:t>
-            </a:r>
-            <a:r>
-              <a:rPr sz="1700" b="0">
-                <a:solidFill>
-                  <a:srgbClr val="8A94A6"/>
-                </a:solidFill>
-                <a:latin typeface="Arial"/>
-              </a:rPr>
-              <a:t>Author, Year. Title. Where it appeared.  —  what it found</a:t>
-            </a:r>
-          </a:p>
-          <a:p>
-            <a:pPr algn="l">
-              <a:lnSpc>
-                <a:spcPct val="145000"/>
-              </a:lnSpc>
-            </a:pPr>
-            <a:r>
-              <a:rPr sz="1700" b="1">
-                <a:solidFill>
-                  <a:srgbClr val="00FF41"/>
-                </a:solidFill>
-                <a:latin typeface="Arial"/>
-              </a:rPr>
-              <a:t>•  </a:t>
-            </a:r>
-            <a:r>
-              <a:rPr sz="1700" b="0">
-                <a:solidFill>
-                  <a:srgbClr val="8A94A6"/>
-                </a:solidFill>
-                <a:latin typeface="Arial"/>
-              </a:rPr>
-              <a:t>Author, Year. Title. Where it appeared.  —  what it found</a:t>
-            </a:r>
-          </a:p>
-          <a:p>
-            <a:pPr algn="l">
-              <a:lnSpc>
-                <a:spcPct val="145000"/>
-              </a:lnSpc>
-            </a:pPr>
-            <a:r>
-              <a:rPr sz="1700" b="1">
-                <a:solidFill>
-                  <a:srgbClr val="00FF41"/>
-                </a:solidFill>
-                <a:latin typeface="Arial"/>
-              </a:rPr>
-              <a:t>•  </a:t>
-            </a:r>
-            <a:r>
-              <a:rPr sz="1700" b="0">
-                <a:solidFill>
-                  <a:srgbClr val="8A94A6"/>
-                </a:solidFill>
-                <a:latin typeface="Arial"/>
-              </a:rPr>
-              <a:t>Author, Year. Title. Where it appeared.  —  what it found</a:t>
-            </a:r>
-          </a:p>
-        </p:txBody>
-      </p:sp>
-      <p:sp>
-        <p:nvSpPr>
-          <p:cNvPr id="6" name="TextBox 5"/>
-          <p:cNvSpPr txBox="1"/>
-          <p:nvPr/>
-        </p:nvSpPr>
-        <p:spPr>
-          <a:xfrm>
-            <a:off x="658368" y="5715000"/>
-            <a:ext cx="10881360" cy="365760"/>
+            <a:off x="841248" y="2487168"/>
+            <a:ext cx="10424160" cy="457200"/>
           </a:xfrm>
           <a:prstGeom prst="rect">
             <a:avLst/>
@@ -6375,13 +6914,474 @@
               </a:lnSpc>
             </a:pPr>
             <a:r>
-              <a:rPr sz="1300" b="0">
+              <a:rPr sz="1500" b="1">
+                <a:solidFill>
+                  <a:srgbClr val="00FF41"/>
+                </a:solidFill>
+                <a:latin typeface="Courier New"/>
+              </a:rPr>
+              <a:t>PART 3 — OUTLOOK</a:t>
+            </a:r>
+          </a:p>
+        </p:txBody>
+      </p:sp>
+      <p:sp>
+        <p:nvSpPr>
+          <p:cNvPr id="5" name="TextBox 4"/>
+          <p:cNvSpPr txBox="1"/>
+          <p:nvPr/>
+        </p:nvSpPr>
+        <p:spPr>
+          <a:xfrm>
+            <a:off x="804672" y="2971800"/>
+            <a:ext cx="10607040" cy="1097280"/>
+          </a:xfrm>
+          <a:prstGeom prst="rect">
+            <a:avLst/>
+          </a:prstGeom>
+          <a:noFill/>
+        </p:spPr>
+        <p:txBody>
+          <a:bodyPr wrap="square" anchor="t">
+            <a:spAutoFit/>
+          </a:bodyPr>
+          <a:lstStyle/>
+          <a:p>
+            <a:pPr algn="l">
+              <a:lnSpc>
+                <a:spcPct val="103000"/>
+              </a:lnSpc>
+            </a:pPr>
+            <a:r>
+              <a:rPr sz="3800" b="1">
+                <a:solidFill>
+                  <a:srgbClr val="F5F7FA"/>
+                </a:solidFill>
+                <a:latin typeface="Arial"/>
+              </a:rPr>
+              <a:t>What related research has already found</a:t>
+            </a:r>
+          </a:p>
+        </p:txBody>
+      </p:sp>
+      <p:sp>
+        <p:nvSpPr>
+          <p:cNvPr id="6" name="TextBox 5"/>
+          <p:cNvSpPr txBox="1"/>
+          <p:nvPr/>
+        </p:nvSpPr>
+        <p:spPr>
+          <a:xfrm>
+            <a:off x="841248" y="4224528"/>
+            <a:ext cx="10424160" cy="1737360"/>
+          </a:xfrm>
+          <a:prstGeom prst="rect">
+            <a:avLst/>
+          </a:prstGeom>
+          <a:noFill/>
+        </p:spPr>
+        <p:txBody>
+          <a:bodyPr wrap="square" anchor="t">
+            <a:spAutoFit/>
+          </a:bodyPr>
+          <a:lstStyle/>
+          <a:p>
+            <a:pPr algn="l">
+              <a:lnSpc>
+                <a:spcPct val="128000"/>
+              </a:lnSpc>
+            </a:pPr>
+            <a:r>
+              <a:rPr sz="1700" b="1">
+                <a:solidFill>
+                  <a:srgbClr val="00FF41"/>
+                </a:solidFill>
+                <a:latin typeface="Arial"/>
+              </a:rPr>
+              <a:t>→  </a:t>
+            </a:r>
+            <a:r>
+              <a:rPr sz="1700" b="0">
+                <a:solidFill>
+                  <a:srgbClr val="8A94A6"/>
+                </a:solidFill>
+                <a:latin typeface="Arial"/>
+              </a:rPr>
+              <a:t>What have others tried in order to move this value?</a:t>
+            </a:r>
+          </a:p>
+          <a:p>
+            <a:pPr algn="l">
+              <a:lnSpc>
+                <a:spcPct val="128000"/>
+              </a:lnSpc>
+            </a:pPr>
+            <a:r>
+              <a:rPr sz="1700" b="1">
+                <a:solidFill>
+                  <a:srgbClr val="00FF41"/>
+                </a:solidFill>
+                <a:latin typeface="Arial"/>
+              </a:rPr>
+              <a:t>→  </a:t>
+            </a:r>
+            <a:r>
+              <a:rPr sz="1700" b="0">
+                <a:solidFill>
+                  <a:srgbClr val="8A94A6"/>
+                </a:solidFill>
+                <a:latin typeface="Arial"/>
+              </a:rPr>
+              <a:t>What worked — and what failed?</a:t>
+            </a:r>
+          </a:p>
+          <a:p>
+            <a:pPr algn="l">
+              <a:lnSpc>
+                <a:spcPct val="128000"/>
+              </a:lnSpc>
+            </a:pPr>
+            <a:r>
+              <a:rPr sz="1700" b="1">
+                <a:solidFill>
+                  <a:srgbClr val="00FF41"/>
+                </a:solidFill>
+                <a:latin typeface="Arial"/>
+              </a:rPr>
+              <a:t>→  </a:t>
+            </a:r>
+            <a:r>
+              <a:rPr sz="1700" b="0">
+                <a:solidFill>
+                  <a:srgbClr val="8A94A6"/>
+                </a:solidFill>
+                <a:latin typeface="Arial"/>
+              </a:rPr>
+              <a:t>2–3 REAL sources. Never invent a citation.</a:t>
+            </a:r>
+          </a:p>
+        </p:txBody>
+      </p:sp>
+      <p:sp>
+        <p:nvSpPr>
+          <p:cNvPr id="7" name="TextBox 6"/>
+          <p:cNvSpPr txBox="1"/>
+          <p:nvPr/>
+        </p:nvSpPr>
+        <p:spPr>
+          <a:xfrm>
+            <a:off x="640080" y="6355080"/>
+            <a:ext cx="10972800" cy="365760"/>
+          </a:xfrm>
+          <a:prstGeom prst="rect">
+            <a:avLst/>
+          </a:prstGeom>
+          <a:noFill/>
+        </p:spPr>
+        <p:txBody>
+          <a:bodyPr wrap="square" anchor="t">
+            <a:spAutoFit/>
+          </a:bodyPr>
+          <a:lstStyle/>
+          <a:p>
+            <a:pPr algn="l">
+              <a:lnSpc>
+                <a:spcPct val="100000"/>
+              </a:lnSpc>
+            </a:pPr>
+            <a:r>
+              <a:rPr sz="1000" b="0">
                 <a:solidFill>
                   <a:srgbClr val="5A6474"/>
                 </a:solidFill>
                 <a:latin typeface="Courier New"/>
               </a:rPr>
-              <a:t>Real papers only — never invent a citation.</a:t>
+              <a:t>Value Verification · TECHIE 1121 · Cornell Tech · Tue Jul 28</a:t>
+            </a:r>
+          </a:p>
+        </p:txBody>
+      </p:sp>
+    </p:spTree>
+  </p:cSld>
+  <p:clrMapOvr>
+    <a:masterClrMapping/>
+  </p:clrMapOvr>
+</p:sld>
+</file>
+
+<file path=ppt/slides/slide9.xml><?xml version="1.0" encoding="utf-8"?>
+<p:sld xmlns:a="http://schemas.openxmlformats.org/drawingml/2006/main" xmlns:p="http://schemas.openxmlformats.org/presentationml/2006/main" xmlns:r="http://schemas.openxmlformats.org/officeDocument/2006/relationships">
+  <p:cSld>
+    <p:bg>
+      <p:bgPr>
+        <a:solidFill>
+          <a:srgbClr val="0B0E14"/>
+        </a:solidFill>
+        <a:effectLst/>
+      </p:bgPr>
+    </p:bg>
+    <p:spTree>
+      <p:nvGrpSpPr>
+        <p:cNvPr id="1" name=""/>
+        <p:cNvGrpSpPr/>
+        <p:nvPr/>
+      </p:nvGrpSpPr>
+      <p:grpSpPr/>
+      <p:sp>
+        <p:nvSpPr>
+          <p:cNvPr id="2" name="Rectangle 1"/>
+          <p:cNvSpPr/>
+          <p:nvPr/>
+        </p:nvSpPr>
+        <p:spPr>
+          <a:xfrm>
+            <a:off x="0" y="0"/>
+            <a:ext cx="256032" cy="6858000"/>
+          </a:xfrm>
+          <a:prstGeom prst="rect">
+            <a:avLst/>
+          </a:prstGeom>
+          <a:solidFill>
+            <a:srgbClr val="00FF41"/>
+          </a:solidFill>
+          <a:ln>
+            <a:noFill/>
+          </a:ln>
+          <a:effectLst/>
+        </p:spPr>
+        <p:style>
+          <a:lnRef idx="1">
+            <a:schemeClr val="accent1"/>
+          </a:lnRef>
+          <a:fillRef idx="3">
+            <a:schemeClr val="accent1"/>
+          </a:fillRef>
+          <a:effectRef idx="2">
+            <a:schemeClr val="accent1"/>
+          </a:effectRef>
+          <a:fontRef idx="minor">
+            <a:schemeClr val="lt1"/>
+          </a:fontRef>
+        </p:style>
+        <p:txBody>
+          <a:bodyPr rtlCol="0" anchor="ctr"/>
+          <a:lstStyle/>
+          <a:p>
+            <a:pPr algn="ctr"/>
+          </a:p>
+        </p:txBody>
+      </p:sp>
+      <p:sp>
+        <p:nvSpPr>
+          <p:cNvPr id="3" name="TextBox 2"/>
+          <p:cNvSpPr txBox="1"/>
+          <p:nvPr/>
+        </p:nvSpPr>
+        <p:spPr>
+          <a:xfrm>
+            <a:off x="822960" y="1417320"/>
+            <a:ext cx="2743200" cy="1097280"/>
+          </a:xfrm>
+          <a:prstGeom prst="rect">
+            <a:avLst/>
+          </a:prstGeom>
+          <a:noFill/>
+        </p:spPr>
+        <p:txBody>
+          <a:bodyPr wrap="square" anchor="t">
+            <a:spAutoFit/>
+          </a:bodyPr>
+          <a:lstStyle/>
+          <a:p>
+            <a:pPr algn="l">
+              <a:lnSpc>
+                <a:spcPct val="100000"/>
+              </a:lnSpc>
+            </a:pPr>
+            <a:r>
+              <a:rPr sz="6400" b="1">
+                <a:solidFill>
+                  <a:srgbClr val="00FF41"/>
+                </a:solidFill>
+                <a:latin typeface="Courier New"/>
+              </a:rPr>
+              <a:t>05</a:t>
+            </a:r>
+          </a:p>
+        </p:txBody>
+      </p:sp>
+      <p:sp>
+        <p:nvSpPr>
+          <p:cNvPr id="4" name="TextBox 3"/>
+          <p:cNvSpPr txBox="1"/>
+          <p:nvPr/>
+        </p:nvSpPr>
+        <p:spPr>
+          <a:xfrm>
+            <a:off x="841248" y="2487168"/>
+            <a:ext cx="10424160" cy="457200"/>
+          </a:xfrm>
+          <a:prstGeom prst="rect">
+            <a:avLst/>
+          </a:prstGeom>
+          <a:noFill/>
+        </p:spPr>
+        <p:txBody>
+          <a:bodyPr wrap="square" anchor="t">
+            <a:spAutoFit/>
+          </a:bodyPr>
+          <a:lstStyle/>
+          <a:p>
+            <a:pPr algn="l">
+              <a:lnSpc>
+                <a:spcPct val="100000"/>
+              </a:lnSpc>
+            </a:pPr>
+            <a:r>
+              <a:rPr sz="1500" b="1">
+                <a:solidFill>
+                  <a:srgbClr val="00FF41"/>
+                </a:solidFill>
+                <a:latin typeface="Courier New"/>
+              </a:rPr>
+              <a:t>SO WHAT</a:t>
+            </a:r>
+          </a:p>
+        </p:txBody>
+      </p:sp>
+      <p:sp>
+        <p:nvSpPr>
+          <p:cNvPr id="5" name="TextBox 4"/>
+          <p:cNvSpPr txBox="1"/>
+          <p:nvPr/>
+        </p:nvSpPr>
+        <p:spPr>
+          <a:xfrm>
+            <a:off x="804672" y="2971800"/>
+            <a:ext cx="10607040" cy="1097280"/>
+          </a:xfrm>
+          <a:prstGeom prst="rect">
+            <a:avLst/>
+          </a:prstGeom>
+          <a:noFill/>
+        </p:spPr>
+        <p:txBody>
+          <a:bodyPr wrap="square" anchor="t">
+            <a:spAutoFit/>
+          </a:bodyPr>
+          <a:lstStyle/>
+          <a:p>
+            <a:pPr algn="l">
+              <a:lnSpc>
+                <a:spcPct val="103000"/>
+              </a:lnSpc>
+            </a:pPr>
+            <a:r>
+              <a:rPr sz="3800" b="1">
+                <a:solidFill>
+                  <a:srgbClr val="F5F7FA"/>
+                </a:solidFill>
+                <a:latin typeface="Arial"/>
+              </a:rPr>
+              <a:t>Our next design brief</a:t>
+            </a:r>
+          </a:p>
+        </p:txBody>
+      </p:sp>
+      <p:sp>
+        <p:nvSpPr>
+          <p:cNvPr id="6" name="TextBox 5"/>
+          <p:cNvSpPr txBox="1"/>
+          <p:nvPr/>
+        </p:nvSpPr>
+        <p:spPr>
+          <a:xfrm>
+            <a:off x="841248" y="4224528"/>
+            <a:ext cx="10424160" cy="1737360"/>
+          </a:xfrm>
+          <a:prstGeom prst="rect">
+            <a:avLst/>
+          </a:prstGeom>
+          <a:noFill/>
+        </p:spPr>
+        <p:txBody>
+          <a:bodyPr wrap="square" anchor="t">
+            <a:spAutoFit/>
+          </a:bodyPr>
+          <a:lstStyle/>
+          <a:p>
+            <a:pPr algn="l">
+              <a:lnSpc>
+                <a:spcPct val="128000"/>
+              </a:lnSpc>
+            </a:pPr>
+            <a:r>
+              <a:rPr sz="1700" b="1">
+                <a:solidFill>
+                  <a:srgbClr val="00FF41"/>
+                </a:solidFill>
+                <a:latin typeface="Arial"/>
+              </a:rPr>
+              <a:t>→  </a:t>
+            </a:r>
+            <a:r>
+              <a:rPr sz="1700" b="0">
+                <a:solidFill>
+                  <a:srgbClr val="8A94A6"/>
+                </a:solidFill>
+                <a:latin typeface="Arial"/>
+              </a:rPr>
+              <a:t>Verification is a beginning, not a verdict.</a:t>
+            </a:r>
+          </a:p>
+          <a:p>
+            <a:pPr algn="l">
+              <a:lnSpc>
+                <a:spcPct val="128000"/>
+              </a:lnSpc>
+            </a:pPr>
+            <a:r>
+              <a:rPr sz="1700" b="1">
+                <a:solidFill>
+                  <a:srgbClr val="00FF41"/>
+                </a:solidFill>
+                <a:latin typeface="Arial"/>
+              </a:rPr>
+              <a:t>→  </a:t>
+            </a:r>
+            <a:r>
+              <a:rPr sz="1700" b="0">
+                <a:solidFill>
+                  <a:srgbClr val="8A94A6"/>
+                </a:solidFill>
+                <a:latin typeface="Arial"/>
+              </a:rPr>
+              <a:t>What OTHER design could actually achieve this value?</a:t>
+            </a:r>
+          </a:p>
+          <a:p>
+            <a:pPr algn="l">
+              <a:lnSpc>
+                <a:spcPct val="128000"/>
+              </a:lnSpc>
+            </a:pPr>
+            <a:r>
+              <a:rPr sz="1700" b="1">
+                <a:solidFill>
+                  <a:srgbClr val="00FF41"/>
+                </a:solidFill>
+                <a:latin typeface="Arial"/>
+              </a:rPr>
+              <a:t>→  </a:t>
+            </a:r>
+            <a:r>
+              <a:rPr sz="1700" b="0">
+                <a:solidFill>
+                  <a:srgbClr val="8A94A6"/>
+                </a:solidFill>
+                <a:latin typeface="Arial"/>
+              </a:rPr>
+              <a:t>What should the next cycle discover? (You carry this into Wednesday.)</a:t>
             </a:r>
           </a:p>
         </p:txBody>

--- a/slides/team-decks/Week3-Tue-the-professors-favorites.pptx
+++ b/slides/team-decks/Week3-Tue-the-professors-favorites.pptx
@@ -511,7 +511,7 @@
           <a:lstStyle/>
           <a:p>
             <a:r>
-              <a:t>Title slide. Confirm the value and the member list before presenting.</a:t>
+              <a:t>Team name = the value you carry into the final. Confirm the value + members before presenting.</a:t>
             </a:r>
           </a:p>
         </p:txBody>
@@ -4067,7 +4067,7 @@
         </p:nvSpPr>
         <p:spPr>
           <a:xfrm>
-            <a:off x="822960" y="1600200"/>
+            <a:off x="822960" y="1554480"/>
             <a:ext cx="10515600" cy="457200"/>
           </a:xfrm>
           <a:prstGeom prst="rect">
@@ -4106,7 +4106,7 @@
         </p:nvSpPr>
         <p:spPr>
           <a:xfrm>
-            <a:off x="804672" y="2148840"/>
+            <a:off x="804672" y="2103120"/>
             <a:ext cx="10607040" cy="1737360"/>
           </a:xfrm>
           <a:prstGeom prst="rect">
@@ -4128,11 +4128,11 @@
             <a:r>
               <a:rPr sz="4600" b="1">
                 <a:solidFill>
-                  <a:srgbClr val="F5F7FA"/>
-                </a:solidFill>
-                <a:latin typeface="Arial"/>
-              </a:rPr>
-              <a:t>The Professor's Favorites</a:t>
+                  <a:srgbClr val="8A94A6"/>
+                </a:solidFill>
+                <a:latin typeface="Arial"/>
+              </a:rPr>
+              <a:t>[ name your team after your value ]</a:t>
             </a:r>
           </a:p>
         </p:txBody>
@@ -4184,8 +4184,8 @@
         </p:nvSpPr>
         <p:spPr>
           <a:xfrm>
-            <a:off x="841248" y="4526280"/>
-            <a:ext cx="10424160" cy="548640"/>
+            <a:off x="841248" y="4434840"/>
+            <a:ext cx="10424160" cy="457200"/>
           </a:xfrm>
           <a:prstGeom prst="rect">
             <a:avLst/>
@@ -4204,22 +4204,13 @@
               </a:lnSpc>
             </a:pPr>
             <a:r>
-              <a:rPr sz="1800" b="0">
-                <a:solidFill>
-                  <a:srgbClr val="F5F7FA"/>
-                </a:solidFill>
-                <a:latin typeface="Arial"/>
-              </a:rPr>
-              <a:t>The value we're carrying:  </a:t>
-            </a:r>
-            <a:r>
-              <a:rPr sz="1800" b="1">
-                <a:solidFill>
-                  <a:srgbClr val="8A94A6"/>
-                </a:solidFill>
-                <a:latin typeface="Arial"/>
-              </a:rPr>
-              <a:t>[ fill in ]</a:t>
+              <a:rPr sz="1300" b="0">
+                <a:solidFill>
+                  <a:srgbClr val="5A6474"/>
+                </a:solidFill>
+                <a:latin typeface="Courier New"/>
+              </a:rPr>
+              <a:t>GitHub team: The Professor's Favorites</a:t>
             </a:r>
           </a:p>
         </p:txBody>

--- a/slides/team-decks/Week3-Tue-the-professors-favorites.pptx
+++ b/slides/team-decks/Week3-Tue-the-professors-favorites.pptx
@@ -7322,7 +7322,7 @@
                 </a:solidFill>
                 <a:latin typeface="Arial"/>
               </a:rPr>
-              <a:t>Verification is a beginning, not a verdict.</a:t>
+              <a:t>Verification opens the next design - it doesn't just grade this one.</a:t>
             </a:r>
           </a:p>
           <a:p>

--- a/slides/team-decks/Week3-Tue-the-professors-favorites.pptx
+++ b/slides/team-decks/Week3-Tue-the-professors-favorites.pptx
@@ -4093,7 +4093,7 @@
                 </a:solidFill>
                 <a:latin typeface="Courier New"/>
               </a:rPr>
-              <a:t>VALUE VERIFICATION · TEAM RESEARCH DECK</a:t>
+              <a:t>VALUE-CENTERED USER RESEARCH DECK</a:t>
             </a:r>
           </a:p>
         </p:txBody>
@@ -4128,11 +4128,11 @@
             <a:r>
               <a:rPr sz="4600" b="1">
                 <a:solidFill>
-                  <a:srgbClr val="8A94A6"/>
-                </a:solidFill>
-                <a:latin typeface="Arial"/>
-              </a:rPr>
-              <a:t>[ name your team after your value ]</a:t>
+                  <a:srgbClr val="F5F7FA"/>
+                </a:solidFill>
+                <a:latin typeface="Arial"/>
+              </a:rPr>
+              <a:t>The Productivity Team</a:t>
             </a:r>
           </a:p>
         </p:txBody>
@@ -4184,8 +4184,8 @@
         </p:nvSpPr>
         <p:spPr>
           <a:xfrm>
-            <a:off x="841248" y="4434840"/>
-            <a:ext cx="10424160" cy="457200"/>
+            <a:off x="841248" y="4206240"/>
+            <a:ext cx="10607040" cy="457200"/>
           </a:xfrm>
           <a:prstGeom prst="rect">
             <a:avLst/>
@@ -4204,6 +4204,54 @@
               </a:lnSpc>
             </a:pPr>
             <a:r>
+              <a:rPr sz="1500" b="1">
+                <a:solidFill>
+                  <a:srgbClr val="00FF41"/>
+                </a:solidFill>
+                <a:latin typeface="Courier New"/>
+              </a:rPr>
+              <a:t>Project 2:  </a:t>
+            </a:r>
+            <a:r>
+              <a:rPr sz="1500" b="0">
+                <a:solidFill>
+                  <a:srgbClr val="8A94A6"/>
+                </a:solidFill>
+                <a:latin typeface="Arial"/>
+              </a:rPr>
+              <a:t>Justina - focus for writers &amp; students  (same project as liam-justin-sebastien)</a:t>
+            </a:r>
+          </a:p>
+        </p:txBody>
+      </p:sp>
+      <p:sp>
+        <p:nvSpPr>
+          <p:cNvPr id="7" name="TextBox 6"/>
+          <p:cNvSpPr txBox="1"/>
+          <p:nvPr/>
+        </p:nvSpPr>
+        <p:spPr>
+          <a:xfrm>
+            <a:off x="841248" y="4709160"/>
+            <a:ext cx="10424160" cy="457200"/>
+          </a:xfrm>
+          <a:prstGeom prst="rect">
+            <a:avLst/>
+          </a:prstGeom>
+          <a:noFill/>
+        </p:spPr>
+        <p:txBody>
+          <a:bodyPr wrap="square" anchor="t">
+            <a:spAutoFit/>
+          </a:bodyPr>
+          <a:lstStyle/>
+          <a:p>
+            <a:pPr algn="l">
+              <a:lnSpc>
+                <a:spcPct val="100000"/>
+              </a:lnSpc>
+            </a:pPr>
+            <a:r>
               <a:rPr sz="1300" b="0">
                 <a:solidFill>
                   <a:srgbClr val="5A6474"/>
@@ -4217,7 +4265,7 @@
       </p:sp>
       <p:sp>
         <p:nvSpPr>
-          <p:cNvPr id="7" name="TextBox 6"/>
+          <p:cNvPr id="8" name="TextBox 7"/>
           <p:cNvSpPr txBox="1"/>
           <p:nvPr/>
         </p:nvSpPr>
@@ -5131,7 +5179,7 @@
                 </a:solidFill>
                 <a:latin typeface="Courier New"/>
               </a:rPr>
-              <a:t>THE VALUE &amp; THE READING</a:t>
+              <a:t>THE VALUE &amp; HOW WE DEFINE IT</a:t>
             </a:r>
           </a:p>
         </p:txBody>
@@ -5170,7 +5218,7 @@
                 </a:solidFill>
                 <a:latin typeface="Arial"/>
               </a:rPr>
-              <a:t>What we claimed — and which reading we built for</a:t>
+              <a:t>What we claimed — and how we operationalize it</a:t>
             </a:r>
           </a:p>
         </p:txBody>
@@ -5243,7 +5291,7 @@
                 </a:solidFill>
                 <a:latin typeface="Arial"/>
               </a:rPr>
-              <a:t>Which reading of the value did we actually design for? (e.g. privacy as control vs. security vs. contextual integrity)</a:t>
+              <a:t>How do we operationalize / define the value? (e.g. privacy as control vs. security vs. contextual integrity)</a:t>
             </a:r>
           </a:p>
           <a:p>
@@ -5268,7 +5316,7 @@
                 </a:solidFill>
                 <a:latin typeface="Arial"/>
               </a:rPr>
-              <a:t>Operationalized: if it's present, users will DO ___ / UNDERSTAND ___ / FEEL ___.</a:t>
+              <a:t>If it's present, users will DO ___ / UNDERSTAND ___ / FEEL ___.</a:t>
             </a:r>
           </a:p>
         </p:txBody>
